--- a/.lessons/23 Fundamental Blade Components/4 Component Slots/1.pptx
+++ b/.lessons/23 Fundamental Blade Components/4 Component Slots/1.pptx
@@ -7,7 +7,10 @@
   <p:sldIdLst>
     <p:sldId id="402" r:id="rId2"/>
     <p:sldId id="403" r:id="rId3"/>
-    <p:sldId id="400" r:id="rId4"/>
+    <p:sldId id="404" r:id="rId4"/>
+    <p:sldId id="405" r:id="rId5"/>
+    <p:sldId id="406" r:id="rId6"/>
+    <p:sldId id="400" r:id="rId7"/>
   </p:sldIdLst>
   <p:sldSz cx="12192000" cy="6858000"/>
   <p:notesSz cx="6858000" cy="9144000"/>
@@ -261,7 +264,7 @@
           <a:p>
             <a:fld id="{3E102D2E-813C-461C-9963-687A650C48C0}" type="datetimeFigureOut">
               <a:rPr lang="en-US" smtClean="0"/>
-              <a:t>5/23/2025</a:t>
+              <a:t>5/25/2025</a:t>
             </a:fld>
             <a:endParaRPr lang="en-US"/>
           </a:p>
@@ -459,7 +462,7 @@
           <a:p>
             <a:fld id="{3E102D2E-813C-461C-9963-687A650C48C0}" type="datetimeFigureOut">
               <a:rPr lang="en-US" smtClean="0"/>
-              <a:t>5/23/2025</a:t>
+              <a:t>5/25/2025</a:t>
             </a:fld>
             <a:endParaRPr lang="en-US"/>
           </a:p>
@@ -667,7 +670,7 @@
           <a:p>
             <a:fld id="{3E102D2E-813C-461C-9963-687A650C48C0}" type="datetimeFigureOut">
               <a:rPr lang="en-US" smtClean="0"/>
-              <a:t>5/23/2025</a:t>
+              <a:t>5/25/2025</a:t>
             </a:fld>
             <a:endParaRPr lang="en-US"/>
           </a:p>
@@ -865,7 +868,7 @@
           <a:p>
             <a:fld id="{3E102D2E-813C-461C-9963-687A650C48C0}" type="datetimeFigureOut">
               <a:rPr lang="en-US" smtClean="0"/>
-              <a:t>5/23/2025</a:t>
+              <a:t>5/25/2025</a:t>
             </a:fld>
             <a:endParaRPr lang="en-US"/>
           </a:p>
@@ -1140,7 +1143,7 @@
           <a:p>
             <a:fld id="{3E102D2E-813C-461C-9963-687A650C48C0}" type="datetimeFigureOut">
               <a:rPr lang="en-US" smtClean="0"/>
-              <a:t>5/23/2025</a:t>
+              <a:t>5/25/2025</a:t>
             </a:fld>
             <a:endParaRPr lang="en-US"/>
           </a:p>
@@ -1405,7 +1408,7 @@
           <a:p>
             <a:fld id="{3E102D2E-813C-461C-9963-687A650C48C0}" type="datetimeFigureOut">
               <a:rPr lang="en-US" smtClean="0"/>
-              <a:t>5/23/2025</a:t>
+              <a:t>5/25/2025</a:t>
             </a:fld>
             <a:endParaRPr lang="en-US"/>
           </a:p>
@@ -1817,7 +1820,7 @@
           <a:p>
             <a:fld id="{3E102D2E-813C-461C-9963-687A650C48C0}" type="datetimeFigureOut">
               <a:rPr lang="en-US" smtClean="0"/>
-              <a:t>5/23/2025</a:t>
+              <a:t>5/25/2025</a:t>
             </a:fld>
             <a:endParaRPr lang="en-US"/>
           </a:p>
@@ -1958,7 +1961,7 @@
           <a:p>
             <a:fld id="{3E102D2E-813C-461C-9963-687A650C48C0}" type="datetimeFigureOut">
               <a:rPr lang="en-US" smtClean="0"/>
-              <a:t>5/23/2025</a:t>
+              <a:t>5/25/2025</a:t>
             </a:fld>
             <a:endParaRPr lang="en-US"/>
           </a:p>
@@ -2071,7 +2074,7 @@
           <a:p>
             <a:fld id="{3E102D2E-813C-461C-9963-687A650C48C0}" type="datetimeFigureOut">
               <a:rPr lang="en-US" smtClean="0"/>
-              <a:t>5/23/2025</a:t>
+              <a:t>5/25/2025</a:t>
             </a:fld>
             <a:endParaRPr lang="en-US"/>
           </a:p>
@@ -2382,7 +2385,7 @@
           <a:p>
             <a:fld id="{3E102D2E-813C-461C-9963-687A650C48C0}" type="datetimeFigureOut">
               <a:rPr lang="en-US" smtClean="0"/>
-              <a:t>5/23/2025</a:t>
+              <a:t>5/25/2025</a:t>
             </a:fld>
             <a:endParaRPr lang="en-US"/>
           </a:p>
@@ -2670,7 +2673,7 @@
           <a:p>
             <a:fld id="{3E102D2E-813C-461C-9963-687A650C48C0}" type="datetimeFigureOut">
               <a:rPr lang="en-US" smtClean="0"/>
-              <a:t>5/23/2025</a:t>
+              <a:t>5/25/2025</a:t>
             </a:fld>
             <a:endParaRPr lang="en-US"/>
           </a:p>
@@ -2911,7 +2914,7 @@
           <a:p>
             <a:fld id="{3E102D2E-813C-461C-9963-687A650C48C0}" type="datetimeFigureOut">
               <a:rPr lang="en-US" smtClean="0"/>
-              <a:t>5/23/2025</a:t>
+              <a:t>5/25/2025</a:t>
             </a:fld>
             <a:endParaRPr lang="en-US"/>
           </a:p>
@@ -3349,7 +3352,7 @@
         <p:spPr>
           <a:xfrm>
             <a:off x="217714" y="255046"/>
-            <a:ext cx="11756571" cy="355354"/>
+            <a:ext cx="11756571" cy="655436"/>
           </a:xfrm>
           <a:prstGeom prst="rect">
             <a:avLst/>
@@ -3369,6 +3372,18 @@
               <a:buNone/>
             </a:pPr>
             <a:r>
+              <a:rPr lang="en-US" altLang="en-US" sz="1300">
+                <a:latin typeface="Arial" panose="020B0604020202020204" pitchFamily="34" charset="0"/>
+              </a:rPr>
+              <a:t> </a:t>
+            </a:r>
+            <a:r>
+              <a:rPr lang="az-Latn-AZ" altLang="en-US" sz="1300">
+                <a:latin typeface="Arial" panose="020B0604020202020204" pitchFamily="34" charset="0"/>
+              </a:rPr>
+              <a:t>Əgər</a:t>
+            </a:r>
+            <a:r>
               <a:rPr kumimoji="0" lang="en-US" altLang="en-US" sz="1300" b="0" i="0" u="none" strike="noStrike" cap="none" normalizeH="0" baseline="0">
                 <a:ln>
                   <a:noFill/>
@@ -3379,11 +3394,252 @@
                 <a:effectLst/>
                 <a:latin typeface="Arial" panose="020B0604020202020204" pitchFamily="34" charset="0"/>
               </a:rPr>
-              <a:t>.</a:t>
-            </a:r>
-          </a:p>
-        </p:txBody>
-      </p:sp>
+              <a:t> </a:t>
+            </a:r>
+            <a:r>
+              <a:rPr kumimoji="0" lang="en-US" altLang="en-US" sz="1300" b="1" i="0" u="none" strike="noStrike" cap="none" normalizeH="0" baseline="0">
+                <a:ln>
+                  <a:noFill/>
+                </a:ln>
+                <a:solidFill>
+                  <a:schemeClr val="tx1"/>
+                </a:solidFill>
+                <a:effectLst/>
+                <a:latin typeface="Arial" panose="020B0604020202020204" pitchFamily="34" charset="0"/>
+              </a:rPr>
+              <a:t>komponentə</a:t>
+            </a:r>
+            <a:r>
+              <a:rPr kumimoji="0" lang="en-US" altLang="en-US" sz="1300" b="0" i="0" u="none" strike="noStrike" cap="none" normalizeH="0" baseline="0">
+                <a:ln>
+                  <a:noFill/>
+                </a:ln>
+                <a:solidFill>
+                  <a:schemeClr val="tx1"/>
+                </a:solidFill>
+                <a:effectLst/>
+                <a:latin typeface="Arial" panose="020B0604020202020204" pitchFamily="34" charset="0"/>
+              </a:rPr>
+              <a:t> məzmun ötürmək istəyirik</a:t>
+            </a:r>
+            <a:r>
+              <a:rPr kumimoji="0" lang="az-Latn-AZ" altLang="en-US" sz="1300" b="0" i="0" u="none" strike="noStrike" cap="none" normalizeH="0" baseline="0">
+                <a:ln>
+                  <a:noFill/>
+                </a:ln>
+                <a:solidFill>
+                  <a:schemeClr val="tx1"/>
+                </a:solidFill>
+                <a:effectLst/>
+                <a:latin typeface="Arial" panose="020B0604020202020204" pitchFamily="34" charset="0"/>
+              </a:rPr>
+              <a:t>sə</a:t>
+            </a:r>
+            <a:r>
+              <a:rPr lang="az-Latn-AZ" altLang="en-US" sz="1300">
+                <a:latin typeface="Arial" panose="020B0604020202020204" pitchFamily="34" charset="0"/>
+              </a:rPr>
+              <a:t>,</a:t>
+            </a:r>
+            <a:r>
+              <a:rPr kumimoji="0" lang="en-US" altLang="en-US" sz="1300" b="0" i="0" u="none" strike="noStrike" cap="none" normalizeH="0" baseline="0">
+                <a:ln>
+                  <a:noFill/>
+                </a:ln>
+                <a:solidFill>
+                  <a:schemeClr val="tx1"/>
+                </a:solidFill>
+                <a:effectLst/>
+                <a:latin typeface="Arial" panose="020B0604020202020204" pitchFamily="34" charset="0"/>
+              </a:rPr>
+              <a:t> </a:t>
+            </a:r>
+            <a:r>
+              <a:rPr kumimoji="0" lang="az-Latn-AZ" altLang="en-US" sz="1300" b="0" i="0" u="none" strike="noStrike" cap="none" normalizeH="0" baseline="0">
+                <a:ln>
+                  <a:noFill/>
+                </a:ln>
+                <a:solidFill>
+                  <a:schemeClr val="tx1"/>
+                </a:solidFill>
+                <a:effectLst/>
+                <a:latin typeface="Arial" panose="020B0604020202020204" pitchFamily="34" charset="0"/>
+              </a:rPr>
+              <a:t>b</a:t>
+            </a:r>
+            <a:r>
+              <a:rPr kumimoji="0" lang="en-US" altLang="en-US" sz="1300" b="0" i="0" u="none" strike="noStrike" cap="none" normalizeH="0" baseline="0">
+                <a:ln>
+                  <a:noFill/>
+                </a:ln>
+                <a:solidFill>
+                  <a:schemeClr val="tx1"/>
+                </a:solidFill>
+                <a:effectLst/>
+                <a:latin typeface="Arial" panose="020B0604020202020204" pitchFamily="34" charset="0"/>
+              </a:rPr>
+              <a:t>unun üçün </a:t>
+            </a:r>
+            <a:r>
+              <a:rPr kumimoji="0" lang="en-US" altLang="en-US" sz="1300" b="1" i="0" u="none" strike="noStrike" cap="none" normalizeH="0" baseline="0">
+                <a:ln>
+                  <a:noFill/>
+                </a:ln>
+                <a:solidFill>
+                  <a:srgbClr val="FF0000"/>
+                </a:solidFill>
+                <a:effectLst/>
+                <a:latin typeface="Arial" panose="020B0604020202020204" pitchFamily="34" charset="0"/>
+              </a:rPr>
+              <a:t>slot</a:t>
+            </a:r>
+            <a:r>
+              <a:rPr kumimoji="0" lang="en-US" altLang="en-US" sz="1300" b="0" i="0" u="none" strike="noStrike" cap="none" normalizeH="0" baseline="0">
+                <a:ln>
+                  <a:noFill/>
+                </a:ln>
+                <a:solidFill>
+                  <a:schemeClr val="tx1"/>
+                </a:solidFill>
+                <a:effectLst/>
+                <a:latin typeface="Arial" panose="020B0604020202020204" pitchFamily="34" charset="0"/>
+              </a:rPr>
+              <a:t> istifadə olunur.</a:t>
+            </a:r>
+            <a:r>
+              <a:rPr kumimoji="0" lang="az-Latn-AZ" altLang="en-US" sz="1300" b="0" i="0" u="none" strike="noStrike" cap="none" normalizeH="0" baseline="0">
+                <a:ln>
+                  <a:noFill/>
+                </a:ln>
+                <a:solidFill>
+                  <a:schemeClr val="tx1"/>
+                </a:solidFill>
+                <a:effectLst/>
+                <a:latin typeface="Arial" panose="020B0604020202020204" pitchFamily="34" charset="0"/>
+              </a:rPr>
+              <a:t> Beləliklə bir </a:t>
+            </a:r>
+            <a:r>
+              <a:rPr kumimoji="0" lang="az-Latn-AZ" altLang="en-US" sz="1300" b="1" i="0" u="none" strike="noStrike" cap="none" normalizeH="0" baseline="0">
+                <a:ln>
+                  <a:noFill/>
+                </a:ln>
+                <a:solidFill>
+                  <a:schemeClr val="tx1"/>
+                </a:solidFill>
+                <a:effectLst/>
+                <a:latin typeface="Arial" panose="020B0604020202020204" pitchFamily="34" charset="0"/>
+              </a:rPr>
+              <a:t>componenti</a:t>
+            </a:r>
+            <a:r>
+              <a:rPr kumimoji="0" lang="az-Latn-AZ" altLang="en-US" sz="1300" b="0" i="0" u="none" strike="noStrike" cap="none" normalizeH="0" baseline="0">
+                <a:ln>
+                  <a:noFill/>
+                </a:ln>
+                <a:solidFill>
+                  <a:schemeClr val="tx1"/>
+                </a:solidFill>
+                <a:effectLst/>
+                <a:latin typeface="Arial" panose="020B0604020202020204" pitchFamily="34" charset="0"/>
+              </a:rPr>
+              <a:t> dəfələrlə çağırdıqda </a:t>
+            </a:r>
+            <a:r>
+              <a:rPr kumimoji="0" lang="az-Latn-AZ" altLang="en-US" sz="1300" b="1" i="0" u="none" strike="noStrike" cap="none" normalizeH="0" baseline="0">
+                <a:ln>
+                  <a:noFill/>
+                </a:ln>
+                <a:solidFill>
+                  <a:schemeClr val="tx1"/>
+                </a:solidFill>
+                <a:effectLst/>
+                <a:latin typeface="Arial" panose="020B0604020202020204" pitchFamily="34" charset="0"/>
+              </a:rPr>
+              <a:t>fərqli məzmunlar </a:t>
+            </a:r>
+            <a:r>
+              <a:rPr kumimoji="0" lang="az-Latn-AZ" altLang="en-US" sz="1300" b="0" i="0" u="none" strike="noStrike" cap="none" normalizeH="0" baseline="0">
+                <a:ln>
+                  <a:noFill/>
+                </a:ln>
+                <a:solidFill>
+                  <a:schemeClr val="tx1"/>
+                </a:solidFill>
+                <a:effectLst/>
+                <a:latin typeface="Arial" panose="020B0604020202020204" pitchFamily="34" charset="0"/>
+              </a:rPr>
+              <a:t>təyin edə bilərik həmin </a:t>
+            </a:r>
+            <a:r>
+              <a:rPr kumimoji="0" lang="az-Latn-AZ" altLang="en-US" sz="1300" b="1" i="0" u="none" strike="noStrike" cap="none" normalizeH="0" baseline="0">
+                <a:ln>
+                  <a:noFill/>
+                </a:ln>
+                <a:solidFill>
+                  <a:schemeClr val="tx1"/>
+                </a:solidFill>
+                <a:effectLst/>
+                <a:latin typeface="Arial" panose="020B0604020202020204" pitchFamily="34" charset="0"/>
+              </a:rPr>
+              <a:t>component</a:t>
+            </a:r>
+            <a:r>
+              <a:rPr kumimoji="0" lang="az-Latn-AZ" altLang="en-US" sz="1300" b="0" i="0" u="none" strike="noStrike" cap="none" normalizeH="0" baseline="0">
+                <a:ln>
+                  <a:noFill/>
+                </a:ln>
+                <a:solidFill>
+                  <a:schemeClr val="tx1"/>
+                </a:solidFill>
+                <a:effectLst/>
+                <a:latin typeface="Arial" panose="020B0604020202020204" pitchFamily="34" charset="0"/>
+              </a:rPr>
+              <a:t> üçün.</a:t>
+            </a:r>
+            <a:endParaRPr kumimoji="0" lang="en-US" altLang="en-US" sz="1300" b="0" i="0" u="none" strike="noStrike" cap="none" normalizeH="0" baseline="0">
+              <a:ln>
+                <a:noFill/>
+              </a:ln>
+              <a:solidFill>
+                <a:schemeClr val="tx1"/>
+              </a:solidFill>
+              <a:effectLst/>
+              <a:latin typeface="Arial" panose="020B0604020202020204" pitchFamily="34" charset="0"/>
+            </a:endParaRPr>
+          </a:p>
+        </p:txBody>
+      </p:sp>
+      <p:pic>
+        <p:nvPicPr>
+          <p:cNvPr id="4" name="Picture 3">
+            <a:extLst>
+              <a:ext uri="{FF2B5EF4-FFF2-40B4-BE49-F238E27FC236}">
+                <a16:creationId xmlns:a16="http://schemas.microsoft.com/office/drawing/2014/main" id="{9ED5D194-7288-72B7-5276-CC66E138A580}"/>
+              </a:ext>
+            </a:extLst>
+          </p:cNvPr>
+          <p:cNvPicPr>
+            <a:picLocks noChangeAspect="1"/>
+          </p:cNvPicPr>
+          <p:nvPr/>
+        </p:nvPicPr>
+        <p:blipFill>
+          <a:blip r:embed="rId2"/>
+          <a:stretch>
+            <a:fillRect/>
+          </a:stretch>
+        </p:blipFill>
+        <p:spPr>
+          <a:xfrm>
+            <a:off x="1560616" y="2533046"/>
+            <a:ext cx="10631384" cy="4324954"/>
+          </a:xfrm>
+          <a:prstGeom prst="rect">
+            <a:avLst/>
+          </a:prstGeom>
+        </p:spPr>
+      </p:pic>
     </p:spTree>
     <p:extLst>
       <p:ext uri="{BB962C8B-B14F-4D97-AF65-F5344CB8AC3E}">
@@ -3434,8 +3690,8 @@
         </p:nvSpPr>
         <p:spPr>
           <a:xfrm>
-            <a:off x="217714" y="255046"/>
-            <a:ext cx="11756571" cy="355354"/>
+            <a:off x="150829" y="189059"/>
+            <a:ext cx="11887200" cy="2001382"/>
           </a:xfrm>
           <a:prstGeom prst="rect">
             <a:avLst/>
@@ -3455,21 +3711,506 @@
               <a:buNone/>
             </a:pPr>
             <a:r>
-              <a:rPr kumimoji="0" lang="en-US" altLang="en-US" sz="1300" b="0" i="0" u="none" strike="noStrike" cap="none" normalizeH="0" baseline="0">
+              <a:rPr kumimoji="0" lang="en-US" altLang="en-US" sz="1050" b="1" i="0" u="none" strike="noStrike" cap="none" normalizeH="0" baseline="0">
                 <a:ln>
                   <a:noFill/>
                 </a:ln>
                 <a:solidFill>
+                  <a:srgbClr val="FF0000"/>
+                </a:solidFill>
+                <a:effectLst/>
+                <a:latin typeface="Arial" panose="020B0604020202020204" pitchFamily="34" charset="0"/>
+              </a:rPr>
+              <a:t>Named Slots </a:t>
+            </a:r>
+            <a:r>
+              <a:rPr kumimoji="0" lang="en-US" altLang="en-US" sz="1050" i="0" u="none" strike="noStrike" cap="none" normalizeH="0" baseline="0">
+                <a:ln>
+                  <a:noFill/>
+                </a:ln>
+                <a:solidFill>
                   <a:schemeClr val="tx1"/>
                 </a:solidFill>
                 <a:effectLst/>
                 <a:latin typeface="Arial" panose="020B0604020202020204" pitchFamily="34" charset="0"/>
               </a:rPr>
-              <a:t>.</a:t>
-            </a:r>
-          </a:p>
-        </p:txBody>
-      </p:sp>
+              <a:t>(</a:t>
+            </a:r>
+            <a:r>
+              <a:rPr kumimoji="0" lang="en-US" altLang="en-US" sz="1050" b="0" i="0" u="none" strike="noStrike" cap="none" normalizeH="0" baseline="0">
+                <a:ln>
+                  <a:noFill/>
+                </a:ln>
+                <a:solidFill>
+                  <a:schemeClr val="tx1"/>
+                </a:solidFill>
+                <a:effectLst/>
+                <a:latin typeface="Arial" panose="020B0604020202020204" pitchFamily="34" charset="0"/>
+              </a:rPr>
+              <a:t>Adlandırılmış slotlar):</a:t>
+            </a:r>
+            <a:r>
+              <a:rPr kumimoji="0" lang="az-Latn-AZ" altLang="en-US" sz="1050" b="0" i="0" u="none" strike="noStrike" cap="none" normalizeH="0" baseline="0">
+                <a:ln>
+                  <a:noFill/>
+                </a:ln>
+                <a:solidFill>
+                  <a:schemeClr val="tx1"/>
+                </a:solidFill>
+                <a:effectLst/>
+                <a:latin typeface="Arial" panose="020B0604020202020204" pitchFamily="34" charset="0"/>
+              </a:rPr>
+              <a:t> Biz burada </a:t>
+            </a:r>
+            <a:r>
+              <a:rPr kumimoji="0" lang="az-Latn-AZ" altLang="en-US" sz="1050" b="1" i="0" u="none" strike="noStrike" cap="none" normalizeH="0" baseline="0">
+                <a:ln>
+                  <a:noFill/>
+                </a:ln>
+                <a:solidFill>
+                  <a:schemeClr val="tx1"/>
+                </a:solidFill>
+                <a:effectLst/>
+                <a:latin typeface="Arial" panose="020B0604020202020204" pitchFamily="34" charset="0"/>
+              </a:rPr>
+              <a:t>Blade Named Slots </a:t>
+            </a:r>
+            <a:r>
+              <a:rPr kumimoji="0" lang="az-Latn-AZ" altLang="en-US" sz="1050" b="0" i="0" u="none" strike="noStrike" cap="none" normalizeH="0" baseline="0">
+                <a:ln>
+                  <a:noFill/>
+                </a:ln>
+                <a:solidFill>
+                  <a:schemeClr val="tx1"/>
+                </a:solidFill>
+                <a:effectLst/>
+                <a:latin typeface="Arial" panose="020B0604020202020204" pitchFamily="34" charset="0"/>
+              </a:rPr>
+              <a:t>(adlandırılmış slotlar) istifadə etmişik. Bu Laravel-in Blade komponentlərində </a:t>
+            </a:r>
+            <a:r>
+              <a:rPr kumimoji="0" lang="az-Latn-AZ" altLang="en-US" sz="1050" b="1" i="0" u="none" strike="noStrike" cap="none" normalizeH="0" baseline="0">
+                <a:ln>
+                  <a:noFill/>
+                </a:ln>
+                <a:solidFill>
+                  <a:schemeClr val="tx1"/>
+                </a:solidFill>
+                <a:effectLst/>
+                <a:latin typeface="Arial" panose="020B0604020202020204" pitchFamily="34" charset="0"/>
+              </a:rPr>
+              <a:t>dinamik</a:t>
+            </a:r>
+            <a:r>
+              <a:rPr kumimoji="0" lang="az-Latn-AZ" altLang="en-US" sz="1050" b="0" i="0" u="none" strike="noStrike" cap="none" normalizeH="0" baseline="0">
+                <a:ln>
+                  <a:noFill/>
+                </a:ln>
+                <a:solidFill>
+                  <a:schemeClr val="tx1"/>
+                </a:solidFill>
+                <a:effectLst/>
+                <a:latin typeface="Arial" panose="020B0604020202020204" pitchFamily="34" charset="0"/>
+              </a:rPr>
+              <a:t> </a:t>
+            </a:r>
+            <a:r>
+              <a:rPr kumimoji="0" lang="az-Latn-AZ" altLang="en-US" sz="1050" b="1" i="0" u="none" strike="noStrike" cap="none" normalizeH="0" baseline="0">
+                <a:ln>
+                  <a:noFill/>
+                </a:ln>
+                <a:solidFill>
+                  <a:schemeClr val="tx1"/>
+                </a:solidFill>
+                <a:effectLst/>
+                <a:latin typeface="Arial" panose="020B0604020202020204" pitchFamily="34" charset="0"/>
+              </a:rPr>
+              <a:t>kontent</a:t>
+            </a:r>
+            <a:r>
+              <a:rPr kumimoji="0" lang="az-Latn-AZ" altLang="en-US" sz="1050" b="0" i="0" u="none" strike="noStrike" cap="none" normalizeH="0" baseline="0">
+                <a:ln>
+                  <a:noFill/>
+                </a:ln>
+                <a:solidFill>
+                  <a:schemeClr val="tx1"/>
+                </a:solidFill>
+                <a:effectLst/>
+                <a:latin typeface="Arial" panose="020B0604020202020204" pitchFamily="34" charset="0"/>
+              </a:rPr>
+              <a:t> hissələrini </a:t>
+            </a:r>
+            <a:r>
+              <a:rPr kumimoji="0" lang="az-Latn-AZ" altLang="en-US" sz="1050" b="1" i="0" u="none" strike="noStrike" cap="none" normalizeH="0" baseline="0">
+                <a:ln>
+                  <a:noFill/>
+                </a:ln>
+                <a:solidFill>
+                  <a:schemeClr val="tx1"/>
+                </a:solidFill>
+                <a:effectLst/>
+                <a:latin typeface="Arial" panose="020B0604020202020204" pitchFamily="34" charset="0"/>
+              </a:rPr>
+              <a:t>adla (name ilə)</a:t>
+            </a:r>
+            <a:r>
+              <a:rPr kumimoji="0" lang="az-Latn-AZ" altLang="en-US" sz="1050" b="0" i="0" u="none" strike="noStrike" cap="none" normalizeH="0" baseline="0">
+                <a:ln>
+                  <a:noFill/>
+                </a:ln>
+                <a:solidFill>
+                  <a:schemeClr val="tx1"/>
+                </a:solidFill>
+                <a:effectLst/>
+                <a:latin typeface="Arial" panose="020B0604020202020204" pitchFamily="34" charset="0"/>
+              </a:rPr>
+              <a:t> ötürmək üçün çox güclü və təmiz bir üsuldur.</a:t>
+            </a:r>
+          </a:p>
+          <a:p>
+            <a:pPr>
+              <a:lnSpc>
+                <a:spcPct val="150000"/>
+              </a:lnSpc>
+              <a:buNone/>
+            </a:pPr>
+            <a:endParaRPr lang="az-Latn-AZ" altLang="en-US" sz="1050">
+              <a:latin typeface="Arial" panose="020B0604020202020204" pitchFamily="34" charset="0"/>
+            </a:endParaRPr>
+          </a:p>
+          <a:p>
+            <a:pPr>
+              <a:lnSpc>
+                <a:spcPct val="150000"/>
+              </a:lnSpc>
+              <a:buNone/>
+            </a:pPr>
+            <a:r>
+              <a:rPr kumimoji="0" lang="en-US" altLang="en-US" sz="1050" b="0" i="0" u="none" strike="noStrike" cap="none" normalizeH="0" baseline="0">
+                <a:ln>
+                  <a:noFill/>
+                </a:ln>
+                <a:solidFill>
+                  <a:schemeClr val="tx1"/>
+                </a:solidFill>
+                <a:effectLst/>
+                <a:latin typeface="Arial" panose="020B0604020202020204" pitchFamily="34" charset="0"/>
+              </a:rPr>
+              <a:t>Burada </a:t>
+            </a:r>
+            <a:r>
+              <a:rPr kumimoji="0" lang="az-Latn-AZ" altLang="en-US" sz="1050" b="0" i="0" u="none" strike="noStrike" cap="none" normalizeH="0" baseline="0">
+                <a:ln>
+                  <a:noFill/>
+                </a:ln>
+                <a:solidFill>
+                  <a:schemeClr val="tx1"/>
+                </a:solidFill>
+                <a:effectLst/>
+                <a:latin typeface="Arial" panose="020B0604020202020204" pitchFamily="34" charset="0"/>
+              </a:rPr>
+              <a:t>biz</a:t>
+            </a:r>
+            <a:r>
+              <a:rPr kumimoji="0" lang="en-US" altLang="en-US" sz="1050" b="0" i="0" u="none" strike="noStrike" cap="none" normalizeH="0" baseline="0">
+                <a:ln>
+                  <a:noFill/>
+                </a:ln>
+                <a:solidFill>
+                  <a:schemeClr val="tx1"/>
+                </a:solidFill>
+                <a:effectLst/>
+                <a:latin typeface="Arial" panose="020B0604020202020204" pitchFamily="34" charset="0"/>
+              </a:rPr>
+              <a:t> </a:t>
+            </a:r>
+            <a:r>
+              <a:rPr kumimoji="0" lang="az-Latn-AZ" altLang="en-US" sz="1050" b="0" i="0" u="none" strike="noStrike" cap="none" normalizeH="0" baseline="0">
+                <a:ln>
+                  <a:noFill/>
+                </a:ln>
+                <a:solidFill>
+                  <a:schemeClr val="tx1"/>
+                </a:solidFill>
+                <a:effectLst/>
+                <a:latin typeface="Arial" panose="020B0604020202020204" pitchFamily="34" charset="0"/>
+              </a:rPr>
+              <a:t>`</a:t>
+            </a:r>
+            <a:r>
+              <a:rPr kumimoji="0" lang="en-US" altLang="en-US" sz="1050" b="1" i="0" u="none" strike="noStrike" cap="none" normalizeH="0" baseline="0">
+                <a:ln>
+                  <a:noFill/>
+                </a:ln>
+                <a:solidFill>
+                  <a:srgbClr val="00B050"/>
+                </a:solidFill>
+                <a:effectLst/>
+                <a:latin typeface="Arial" panose="020B0604020202020204" pitchFamily="34" charset="0"/>
+              </a:rPr>
+              <a:t>x-post.index</a:t>
+            </a:r>
+            <a:r>
+              <a:rPr kumimoji="0" lang="az-Latn-AZ" altLang="en-US" sz="1050" b="0" i="0" u="none" strike="noStrike" cap="none" normalizeH="0" baseline="0">
+                <a:ln>
+                  <a:noFill/>
+                </a:ln>
+                <a:solidFill>
+                  <a:schemeClr val="tx1"/>
+                </a:solidFill>
+                <a:effectLst/>
+                <a:latin typeface="Arial" panose="020B0604020202020204" pitchFamily="34" charset="0"/>
+              </a:rPr>
+              <a:t>`</a:t>
+            </a:r>
+            <a:r>
+              <a:rPr kumimoji="0" lang="en-US" altLang="en-US" sz="1050" b="0" i="0" u="none" strike="noStrike" cap="none" normalizeH="0" baseline="0">
+                <a:ln>
+                  <a:noFill/>
+                </a:ln>
+                <a:solidFill>
+                  <a:schemeClr val="tx1"/>
+                </a:solidFill>
+                <a:effectLst/>
+                <a:latin typeface="Arial" panose="020B0604020202020204" pitchFamily="34" charset="0"/>
+              </a:rPr>
+              <a:t> adlı Blade Component çağırır</a:t>
+            </a:r>
+            <a:r>
+              <a:rPr kumimoji="0" lang="az-Latn-AZ" altLang="en-US" sz="1050" b="0" i="0" u="none" strike="noStrike" cap="none" normalizeH="0" baseline="0">
+                <a:ln>
+                  <a:noFill/>
+                </a:ln>
+                <a:solidFill>
+                  <a:schemeClr val="tx1"/>
+                </a:solidFill>
+                <a:effectLst/>
+                <a:latin typeface="Arial" panose="020B0604020202020204" pitchFamily="34" charset="0"/>
+              </a:rPr>
+              <a:t>ıq</a:t>
+            </a:r>
+            <a:r>
+              <a:rPr kumimoji="0" lang="en-US" altLang="en-US" sz="1050" b="0" i="0" u="none" strike="noStrike" cap="none" normalizeH="0" baseline="0">
+                <a:ln>
+                  <a:noFill/>
+                </a:ln>
+                <a:solidFill>
+                  <a:schemeClr val="tx1"/>
+                </a:solidFill>
+                <a:effectLst/>
+                <a:latin typeface="Arial" panose="020B0604020202020204" pitchFamily="34" charset="0"/>
+              </a:rPr>
+              <a:t> və onun içində 3 ədəd </a:t>
+            </a:r>
+            <a:r>
+              <a:rPr kumimoji="0" lang="en-US" altLang="en-US" sz="1050" b="1" i="0" u="none" strike="noStrike" cap="none" normalizeH="0" baseline="0">
+                <a:ln>
+                  <a:noFill/>
+                </a:ln>
+                <a:solidFill>
+                  <a:schemeClr val="tx1"/>
+                </a:solidFill>
+                <a:effectLst/>
+                <a:latin typeface="Arial" panose="020B0604020202020204" pitchFamily="34" charset="0"/>
+              </a:rPr>
+              <a:t>named slot </a:t>
+            </a:r>
+            <a:r>
+              <a:rPr kumimoji="0" lang="en-US" altLang="en-US" sz="1050" b="0" i="0" u="none" strike="noStrike" cap="none" normalizeH="0" baseline="0">
+                <a:ln>
+                  <a:noFill/>
+                </a:ln>
+                <a:solidFill>
+                  <a:schemeClr val="tx1"/>
+                </a:solidFill>
+                <a:effectLst/>
+                <a:latin typeface="Arial" panose="020B0604020202020204" pitchFamily="34" charset="0"/>
+              </a:rPr>
+              <a:t>(adlandırılmış slot) ötürür</a:t>
+            </a:r>
+            <a:r>
+              <a:rPr kumimoji="0" lang="az-Latn-AZ" altLang="en-US" sz="1050" b="0" i="0" u="none" strike="noStrike" cap="none" normalizeH="0" baseline="0">
+                <a:ln>
+                  <a:noFill/>
+                </a:ln>
+                <a:solidFill>
+                  <a:schemeClr val="tx1"/>
+                </a:solidFill>
+                <a:effectLst/>
+                <a:latin typeface="Arial" panose="020B0604020202020204" pitchFamily="34" charset="0"/>
+              </a:rPr>
+              <a:t>ük.</a:t>
+            </a:r>
+          </a:p>
+          <a:p>
+            <a:pPr>
+              <a:lnSpc>
+                <a:spcPct val="150000"/>
+              </a:lnSpc>
+              <a:buNone/>
+            </a:pPr>
+            <a:endParaRPr lang="az-Latn-AZ" altLang="en-US" sz="1050">
+              <a:latin typeface="Arial" panose="020B0604020202020204" pitchFamily="34" charset="0"/>
+            </a:endParaRPr>
+          </a:p>
+          <a:p>
+            <a:pPr>
+              <a:lnSpc>
+                <a:spcPct val="150000"/>
+              </a:lnSpc>
+              <a:buNone/>
+            </a:pPr>
+            <a:r>
+              <a:rPr kumimoji="0" lang="az-Latn-AZ" altLang="en-US" sz="1050" b="1" i="0" u="none" strike="noStrike" cap="none" normalizeH="0" baseline="0">
+                <a:ln>
+                  <a:noFill/>
+                </a:ln>
+                <a:solidFill>
+                  <a:schemeClr val="tx1"/>
+                </a:solidFill>
+                <a:effectLst/>
+                <a:latin typeface="Arial" panose="020B0604020202020204" pitchFamily="34" charset="0"/>
+              </a:rPr>
+              <a:t>Slot</a:t>
+            </a:r>
+            <a:r>
+              <a:rPr kumimoji="0" lang="az-Latn-AZ" altLang="en-US" sz="1050" b="0" i="0" u="none" strike="noStrike" cap="none" normalizeH="0" baseline="0">
+                <a:ln>
+                  <a:noFill/>
+                </a:ln>
+                <a:solidFill>
+                  <a:schemeClr val="tx1"/>
+                </a:solidFill>
+                <a:effectLst/>
+                <a:latin typeface="Arial" panose="020B0604020202020204" pitchFamily="34" charset="0"/>
+              </a:rPr>
+              <a:t>, Blade Component-lərdə,  sadəcə komponentin içində doldurulan xüsusi bir bölmə deməkdir.</a:t>
+            </a:r>
+          </a:p>
+          <a:p>
+            <a:pPr>
+              <a:lnSpc>
+                <a:spcPct val="150000"/>
+              </a:lnSpc>
+              <a:buNone/>
+            </a:pPr>
+            <a:endParaRPr kumimoji="0" lang="az-Latn-AZ" altLang="en-US" sz="1050" b="0" i="0" u="none" strike="noStrike" cap="none" normalizeH="0" baseline="0">
+              <a:ln>
+                <a:noFill/>
+              </a:ln>
+              <a:solidFill>
+                <a:schemeClr val="tx1"/>
+              </a:solidFill>
+              <a:effectLst/>
+              <a:latin typeface="Arial" panose="020B0604020202020204" pitchFamily="34" charset="0"/>
+            </a:endParaRPr>
+          </a:p>
+          <a:p>
+            <a:pPr>
+              <a:lnSpc>
+                <a:spcPct val="150000"/>
+              </a:lnSpc>
+              <a:buNone/>
+            </a:pPr>
+            <a:r>
+              <a:rPr lang="az-Latn-AZ" altLang="en-US" sz="1050" b="1">
+                <a:solidFill>
+                  <a:srgbClr val="0070C0"/>
+                </a:solidFill>
+                <a:latin typeface="Arial" panose="020B0604020202020204" pitchFamily="34" charset="0"/>
+              </a:rPr>
+              <a:t>x-slot name="image" </a:t>
+            </a:r>
+            <a:r>
+              <a:rPr lang="az-Latn-AZ" altLang="en-US" sz="1050">
+                <a:latin typeface="Arial" panose="020B0604020202020204" pitchFamily="34" charset="0"/>
+              </a:rPr>
+              <a:t>Bu hissədə biz </a:t>
+            </a:r>
+            <a:r>
+              <a:rPr lang="az-Latn-AZ" altLang="en-US" sz="1050" b="1">
+                <a:latin typeface="Arial" panose="020B0604020202020204" pitchFamily="34" charset="0"/>
+              </a:rPr>
+              <a:t>image</a:t>
+            </a:r>
+            <a:r>
+              <a:rPr lang="az-Latn-AZ" altLang="en-US" sz="1050">
+                <a:latin typeface="Arial" panose="020B0604020202020204" pitchFamily="34" charset="0"/>
+              </a:rPr>
+              <a:t> adlı </a:t>
+            </a:r>
+            <a:r>
+              <a:rPr lang="az-Latn-AZ" altLang="en-US" sz="1050" b="1">
+                <a:latin typeface="Arial" panose="020B0604020202020204" pitchFamily="34" charset="0"/>
+              </a:rPr>
+              <a:t>slot</a:t>
+            </a:r>
+            <a:r>
+              <a:rPr lang="az-Latn-AZ" altLang="en-US" sz="1050">
+                <a:latin typeface="Arial" panose="020B0604020202020204" pitchFamily="34" charset="0"/>
+              </a:rPr>
+              <a:t>-a </a:t>
+            </a:r>
+            <a:r>
+              <a:rPr lang="az-Latn-AZ" altLang="en-US" sz="1050" b="1">
+                <a:solidFill>
+                  <a:schemeClr val="accent2"/>
+                </a:solidFill>
+                <a:latin typeface="Arial" panose="020B0604020202020204" pitchFamily="34" charset="0"/>
+              </a:rPr>
+              <a:t>$post-&gt;image </a:t>
+            </a:r>
+            <a:r>
+              <a:rPr lang="az-Latn-AZ" altLang="en-US" sz="1050">
+                <a:latin typeface="Arial" panose="020B0604020202020204" pitchFamily="34" charset="0"/>
+              </a:rPr>
+              <a:t>dəyərini ötürürük. Bu o deməkdir ki: Komponentin içində biz </a:t>
+            </a:r>
+            <a:r>
+              <a:rPr lang="az-Latn-AZ" altLang="en-US" sz="1050" b="1">
+                <a:latin typeface="Arial" panose="020B0604020202020204" pitchFamily="34" charset="0"/>
+              </a:rPr>
+              <a:t>$image </a:t>
+            </a:r>
+            <a:r>
+              <a:rPr lang="az-Latn-AZ" altLang="en-US" sz="1050">
+                <a:latin typeface="Arial" panose="020B0604020202020204" pitchFamily="34" charset="0"/>
+              </a:rPr>
+              <a:t>dəyişənindən istifadə edərək bu dəyəri ala bilərik və.s</a:t>
+            </a:r>
+          </a:p>
+        </p:txBody>
+      </p:sp>
+      <p:pic>
+        <p:nvPicPr>
+          <p:cNvPr id="6" name="Picture 5">
+            <a:extLst>
+              <a:ext uri="{FF2B5EF4-FFF2-40B4-BE49-F238E27FC236}">
+                <a16:creationId xmlns:a16="http://schemas.microsoft.com/office/drawing/2014/main" id="{268A234B-D818-3B4D-1E54-0CA0313156A2}"/>
+              </a:ext>
+            </a:extLst>
+          </p:cNvPr>
+          <p:cNvPicPr>
+            <a:picLocks noChangeAspect="1"/>
+          </p:cNvPicPr>
+          <p:nvPr/>
+        </p:nvPicPr>
+        <p:blipFill>
+          <a:blip r:embed="rId2"/>
+          <a:stretch>
+            <a:fillRect/>
+          </a:stretch>
+        </p:blipFill>
+        <p:spPr>
+          <a:xfrm>
+            <a:off x="-1" y="2305612"/>
+            <a:ext cx="12192000" cy="4550031"/>
+          </a:xfrm>
+          <a:prstGeom prst="rect">
+            <a:avLst/>
+          </a:prstGeom>
+        </p:spPr>
+      </p:pic>
     </p:spTree>
     <p:extLst>
       <p:ext uri="{BB962C8B-B14F-4D97-AF65-F5344CB8AC3E}">
@@ -3484,6 +4225,264 @@
 </file>
 
 <file path=ppt/slides/slide3.xml><?xml version="1.0" encoding="utf-8"?>
+<p:sld xmlns:a="http://schemas.openxmlformats.org/drawingml/2006/main" xmlns:r="http://schemas.openxmlformats.org/officeDocument/2006/relationships" xmlns:p="http://schemas.openxmlformats.org/presentationml/2006/main">
+  <p:cSld>
+    <p:spTree>
+      <p:nvGrpSpPr>
+        <p:cNvPr id="1" name="">
+          <a:extLst>
+            <a:ext uri="{FF2B5EF4-FFF2-40B4-BE49-F238E27FC236}">
+              <a16:creationId xmlns:a16="http://schemas.microsoft.com/office/drawing/2014/main" id="{46F44748-BB4E-65A5-2EE1-F190275CAF79}"/>
+            </a:ext>
+          </a:extLst>
+        </p:cNvPr>
+        <p:cNvGrpSpPr/>
+        <p:nvPr/>
+      </p:nvGrpSpPr>
+      <p:grpSpPr>
+        <a:xfrm>
+          <a:off x="0" y="0"/>
+          <a:ext cx="0" cy="0"/>
+          <a:chOff x="0" y="0"/>
+          <a:chExt cx="0" cy="0"/>
+        </a:xfrm>
+      </p:grpSpPr>
+      <p:sp>
+        <p:nvSpPr>
+          <p:cNvPr id="3" name="TextBox 2">
+            <a:extLst>
+              <a:ext uri="{FF2B5EF4-FFF2-40B4-BE49-F238E27FC236}">
+                <a16:creationId xmlns:a16="http://schemas.microsoft.com/office/drawing/2014/main" id="{91707811-3604-E9B9-1565-350456127309}"/>
+              </a:ext>
+            </a:extLst>
+          </p:cNvPr>
+          <p:cNvSpPr txBox="1"/>
+          <p:nvPr/>
+        </p:nvSpPr>
+        <p:spPr>
+          <a:xfrm>
+            <a:off x="217714" y="255046"/>
+            <a:ext cx="11756571" cy="355354"/>
+          </a:xfrm>
+          <a:prstGeom prst="rect">
+            <a:avLst/>
+          </a:prstGeom>
+          <a:noFill/>
+        </p:spPr>
+        <p:txBody>
+          <a:bodyPr wrap="square">
+            <a:spAutoFit/>
+          </a:bodyPr>
+          <a:lstStyle/>
+          <a:p>
+            <a:pPr>
+              <a:lnSpc>
+                <a:spcPct val="150000"/>
+              </a:lnSpc>
+              <a:buNone/>
+            </a:pPr>
+            <a:r>
+              <a:rPr kumimoji="0" lang="en-US" altLang="en-US" sz="1300" b="0" i="0" u="none" strike="noStrike" cap="none" normalizeH="0" baseline="0">
+                <a:ln>
+                  <a:noFill/>
+                </a:ln>
+                <a:solidFill>
+                  <a:schemeClr val="tx1"/>
+                </a:solidFill>
+                <a:effectLst/>
+                <a:latin typeface="Arial" panose="020B0604020202020204" pitchFamily="34" charset="0"/>
+              </a:rPr>
+              <a:t>.</a:t>
+            </a:r>
+          </a:p>
+        </p:txBody>
+      </p:sp>
+    </p:spTree>
+    <p:extLst>
+      <p:ext uri="{BB962C8B-B14F-4D97-AF65-F5344CB8AC3E}">
+        <p14:creationId xmlns:p14="http://schemas.microsoft.com/office/powerpoint/2010/main" val="3433777836"/>
+      </p:ext>
+    </p:extLst>
+  </p:cSld>
+  <p:clrMapOvr>
+    <a:masterClrMapping/>
+  </p:clrMapOvr>
+</p:sld>
+</file>
+
+<file path=ppt/slides/slide4.xml><?xml version="1.0" encoding="utf-8"?>
+<p:sld xmlns:a="http://schemas.openxmlformats.org/drawingml/2006/main" xmlns:r="http://schemas.openxmlformats.org/officeDocument/2006/relationships" xmlns:p="http://schemas.openxmlformats.org/presentationml/2006/main">
+  <p:cSld>
+    <p:spTree>
+      <p:nvGrpSpPr>
+        <p:cNvPr id="1" name="">
+          <a:extLst>
+            <a:ext uri="{FF2B5EF4-FFF2-40B4-BE49-F238E27FC236}">
+              <a16:creationId xmlns:a16="http://schemas.microsoft.com/office/drawing/2014/main" id="{B114D098-D6EF-95F7-8FBF-F2055402446E}"/>
+            </a:ext>
+          </a:extLst>
+        </p:cNvPr>
+        <p:cNvGrpSpPr/>
+        <p:nvPr/>
+      </p:nvGrpSpPr>
+      <p:grpSpPr>
+        <a:xfrm>
+          <a:off x="0" y="0"/>
+          <a:ext cx="0" cy="0"/>
+          <a:chOff x="0" y="0"/>
+          <a:chExt cx="0" cy="0"/>
+        </a:xfrm>
+      </p:grpSpPr>
+      <p:sp>
+        <p:nvSpPr>
+          <p:cNvPr id="3" name="TextBox 2">
+            <a:extLst>
+              <a:ext uri="{FF2B5EF4-FFF2-40B4-BE49-F238E27FC236}">
+                <a16:creationId xmlns:a16="http://schemas.microsoft.com/office/drawing/2014/main" id="{41159754-BCF8-EB31-83B0-84F97E01A09E}"/>
+              </a:ext>
+            </a:extLst>
+          </p:cNvPr>
+          <p:cNvSpPr txBox="1"/>
+          <p:nvPr/>
+        </p:nvSpPr>
+        <p:spPr>
+          <a:xfrm>
+            <a:off x="217714" y="255046"/>
+            <a:ext cx="11756571" cy="355354"/>
+          </a:xfrm>
+          <a:prstGeom prst="rect">
+            <a:avLst/>
+          </a:prstGeom>
+          <a:noFill/>
+        </p:spPr>
+        <p:txBody>
+          <a:bodyPr wrap="square">
+            <a:spAutoFit/>
+          </a:bodyPr>
+          <a:lstStyle/>
+          <a:p>
+            <a:pPr>
+              <a:lnSpc>
+                <a:spcPct val="150000"/>
+              </a:lnSpc>
+              <a:buNone/>
+            </a:pPr>
+            <a:r>
+              <a:rPr kumimoji="0" lang="en-US" altLang="en-US" sz="1300" b="0" i="0" u="none" strike="noStrike" cap="none" normalizeH="0" baseline="0">
+                <a:ln>
+                  <a:noFill/>
+                </a:ln>
+                <a:solidFill>
+                  <a:schemeClr val="tx1"/>
+                </a:solidFill>
+                <a:effectLst/>
+                <a:latin typeface="Arial" panose="020B0604020202020204" pitchFamily="34" charset="0"/>
+              </a:rPr>
+              <a:t>.</a:t>
+            </a:r>
+          </a:p>
+        </p:txBody>
+      </p:sp>
+    </p:spTree>
+    <p:extLst>
+      <p:ext uri="{BB962C8B-B14F-4D97-AF65-F5344CB8AC3E}">
+        <p14:creationId xmlns:p14="http://schemas.microsoft.com/office/powerpoint/2010/main" val="3770663325"/>
+      </p:ext>
+    </p:extLst>
+  </p:cSld>
+  <p:clrMapOvr>
+    <a:masterClrMapping/>
+  </p:clrMapOvr>
+</p:sld>
+</file>
+
+<file path=ppt/slides/slide5.xml><?xml version="1.0" encoding="utf-8"?>
+<p:sld xmlns:a="http://schemas.openxmlformats.org/drawingml/2006/main" xmlns:r="http://schemas.openxmlformats.org/officeDocument/2006/relationships" xmlns:p="http://schemas.openxmlformats.org/presentationml/2006/main">
+  <p:cSld>
+    <p:spTree>
+      <p:nvGrpSpPr>
+        <p:cNvPr id="1" name="">
+          <a:extLst>
+            <a:ext uri="{FF2B5EF4-FFF2-40B4-BE49-F238E27FC236}">
+              <a16:creationId xmlns:a16="http://schemas.microsoft.com/office/drawing/2014/main" id="{107B6203-3E03-2AA9-7120-AB7BA71C4FB2}"/>
+            </a:ext>
+          </a:extLst>
+        </p:cNvPr>
+        <p:cNvGrpSpPr/>
+        <p:nvPr/>
+      </p:nvGrpSpPr>
+      <p:grpSpPr>
+        <a:xfrm>
+          <a:off x="0" y="0"/>
+          <a:ext cx="0" cy="0"/>
+          <a:chOff x="0" y="0"/>
+          <a:chExt cx="0" cy="0"/>
+        </a:xfrm>
+      </p:grpSpPr>
+      <p:sp>
+        <p:nvSpPr>
+          <p:cNvPr id="3" name="TextBox 2">
+            <a:extLst>
+              <a:ext uri="{FF2B5EF4-FFF2-40B4-BE49-F238E27FC236}">
+                <a16:creationId xmlns:a16="http://schemas.microsoft.com/office/drawing/2014/main" id="{85C4B5DE-EB9F-4C2D-92D0-4F08CAA8EC1E}"/>
+              </a:ext>
+            </a:extLst>
+          </p:cNvPr>
+          <p:cNvSpPr txBox="1"/>
+          <p:nvPr/>
+        </p:nvSpPr>
+        <p:spPr>
+          <a:xfrm>
+            <a:off x="217714" y="255046"/>
+            <a:ext cx="11756571" cy="355354"/>
+          </a:xfrm>
+          <a:prstGeom prst="rect">
+            <a:avLst/>
+          </a:prstGeom>
+          <a:noFill/>
+        </p:spPr>
+        <p:txBody>
+          <a:bodyPr wrap="square">
+            <a:spAutoFit/>
+          </a:bodyPr>
+          <a:lstStyle/>
+          <a:p>
+            <a:pPr>
+              <a:lnSpc>
+                <a:spcPct val="150000"/>
+              </a:lnSpc>
+              <a:buNone/>
+            </a:pPr>
+            <a:r>
+              <a:rPr kumimoji="0" lang="en-US" altLang="en-US" sz="1300" b="0" i="0" u="none" strike="noStrike" cap="none" normalizeH="0" baseline="0">
+                <a:ln>
+                  <a:noFill/>
+                </a:ln>
+                <a:solidFill>
+                  <a:schemeClr val="tx1"/>
+                </a:solidFill>
+                <a:effectLst/>
+                <a:latin typeface="Arial" panose="020B0604020202020204" pitchFamily="34" charset="0"/>
+              </a:rPr>
+              <a:t>.</a:t>
+            </a:r>
+          </a:p>
+        </p:txBody>
+      </p:sp>
+    </p:spTree>
+    <p:extLst>
+      <p:ext uri="{BB962C8B-B14F-4D97-AF65-F5344CB8AC3E}">
+        <p14:creationId xmlns:p14="http://schemas.microsoft.com/office/powerpoint/2010/main" val="138012972"/>
+      </p:ext>
+    </p:extLst>
+  </p:cSld>
+  <p:clrMapOvr>
+    <a:masterClrMapping/>
+  </p:clrMapOvr>
+</p:sld>
+</file>
+
+<file path=ppt/slides/slide6.xml><?xml version="1.0" encoding="utf-8"?>
 <p:sld xmlns:a="http://schemas.openxmlformats.org/drawingml/2006/main" xmlns:r="http://schemas.openxmlformats.org/officeDocument/2006/relationships" xmlns:p="http://schemas.openxmlformats.org/presentationml/2006/main">
   <p:cSld>
     <p:spTree>
